--- a/Planning docs/Slides/lesson-18-4-teacher-slides.pptx
+++ b/Planning docs/Slides/lesson-18-4-teacher-slides.pptx
@@ -5086,7 +5086,7 @@
                 <a:ea typeface="Calibri" pitchFamily="34" charset="-122"/>
                 <a:cs typeface="Calibri" pitchFamily="34" charset="-120"/>
               </a:rPr>
-              <a:t>•  Good readers step back and think about the whole section. Who suffers more? Does either character deserve sympathy?</a:t>
+              <a:t>•  Think back over all five chapters. What is the biggest conflict — between which characters, and over what?</a:t>
             </a:r>
             <a:endParaRPr lang="en-US" sz="1500" dirty="0"/>
           </a:p>
@@ -5103,24 +5103,7 @@
                 <a:ea typeface="Calibri" pitchFamily="34" charset="-122"/>
                 <a:cs typeface="Calibri" pitchFamily="34" charset="-120"/>
               </a:rPr>
-              <a:t>•  Choose one of the three haiku. In your journal, write the one picture it puts in your head — just the picture, no explaining.</a:t>
-            </a:r>
-            <a:endParaRPr lang="en-US" sz="1500" dirty="0"/>
-          </a:p>
-          <a:p>
-            <a:pPr indent="0" marL="0">
-              <a:buNone/>
-            </a:pPr>
-            <a:r>
-              <a:rPr lang="en-US" sz="1500" dirty="0">
-                <a:solidFill>
-                  <a:srgbClr val="1E293B"/>
-                </a:solidFill>
-                <a:latin typeface="Calibri" pitchFamily="34" charset="0"/>
-                <a:ea typeface="Calibri" pitchFamily="34" charset="-122"/>
-                <a:cs typeface="Calibri" pitchFamily="34" charset="-120"/>
-              </a:rPr>
-              <a:t>•  Look at the letters around the dot in each word. Count: vowel, consonant, consonant, vowel. That's the VCCV pattern .</a:t>
+              <a:t>•  The story has just begun. What do you predict will happen when Billy tries to read the ransom note?</a:t>
             </a:r>
             <a:endParaRPr lang="en-US" sz="1500" dirty="0"/>
           </a:p>
